--- a/classes/parte-18-ia-aplicada-a-la-ciberseguridad/331-ia-generativa-y-llms-en-ciberseguridad-panorama-y-limites/clase-331-presentacion.pptx
+++ b/classes/parte-18-ia-aplicada-a-la-ciberseguridad/331-ia-generativa-y-llms-en-ciberseguridad-panorama-y-limites/clase-331-presentacion.pptx
@@ -17,6 +17,10 @@
     <p:sldId id="265" r:id="rId16"/>
     <p:sldId id="266" r:id="rId17"/>
     <p:sldId id="267" r:id="rId18"/>
+    <p:sldId id="268" r:id="rId19"/>
+    <p:sldId id="269" r:id="rId20"/>
+    <p:sldId id="270" r:id="rId21"/>
+    <p:sldId id="271" r:id="rId22"/>
   </p:sldIdLst>
   <p:sldSz cx="9144000" cy="6858000" type="screen4x3"/>
   <p:notesSz cx="6858000" cy="9144000"/>
@@ -3198,7 +3202,7 @@
                   <a:srgbClr val="0B3D2E"/>
                 </a:solidFill>
               </a:rPr>
-              <a:t>⚠️ Errores comunes</a:t>
+              <a:t>🧪 Laboratorio guiado</a:t>
             </a:r>
           </a:p>
         </p:txBody>
@@ -3236,82 +3240,97 @@
                   <a:srgbClr val="22282E"/>
                 </a:solidFill>
               </a:rPr>
-              <a:t>•  El modelo cita una CVE que no existe — Alucinación. Verifica siempre en NVD/MITRE antes de usar el dato.</a:t>
-            </a:r>
-          </a:p>
-          <a:p>
-            <a:pPr>
-              <a:spcAft>
-                <a:spcPts val="600"/>
-              </a:spcAft>
-            </a:pPr>
-            <a:r>
-              <a:rPr sz="1500">
-                <a:solidFill>
-                  <a:srgbClr val="22282E"/>
-                </a:solidFill>
-              </a:rPr>
-              <a:t>•  Sugiere una flag de comando que da error — El modelo mezcló versiones o inventó. Contrasta con man/--help.</a:t>
-            </a:r>
-          </a:p>
-          <a:p>
-            <a:pPr>
-              <a:spcAft>
-                <a:spcPts val="600"/>
-              </a:spcAft>
-            </a:pPr>
-            <a:r>
-              <a:rPr sz="1500">
-                <a:solidFill>
-                  <a:srgbClr val="22282E"/>
-                </a:solidFill>
-              </a:rPr>
-              <a:t>•  "No conozco eventos recientes" — Corte de conocimiento. Aporta tú la información actual por contexto.</a:t>
-            </a:r>
-          </a:p>
-          <a:p>
-            <a:pPr>
-              <a:spcAft>
-                <a:spcPts val="600"/>
-              </a:spcAft>
-            </a:pPr>
-            <a:r>
-              <a:rPr sz="1500">
-                <a:solidFill>
-                  <a:srgbClr val="22282E"/>
-                </a:solidFill>
-              </a:rPr>
-              <a:t>•  Respuestas distintas a la misma pregunta — Aleatoriedad. Baja la temperatura y fija el contexto para tareas precisas.</a:t>
-            </a:r>
-          </a:p>
-          <a:p>
-            <a:pPr>
-              <a:spcAft>
-                <a:spcPts val="600"/>
-              </a:spcAft>
-            </a:pPr>
-            <a:r>
-              <a:rPr sz="1500">
-                <a:solidFill>
-                  <a:srgbClr val="22282E"/>
-                </a:solidFill>
-              </a:rPr>
-              <a:t>•  El modelo "olvida" lo dicho antes — Se salió de la ventana de contexto. Reinyecta lo esencial.</a:t>
-            </a:r>
-          </a:p>
-          <a:p>
-            <a:pPr>
-              <a:spcAft>
-                <a:spcPts val="600"/>
-              </a:spcAft>
-            </a:pPr>
-            <a:r>
-              <a:rPr sz="1500">
-                <a:solidFill>
-                  <a:srgbClr val="22282E"/>
-                </a:solidFill>
-              </a:rPr>
-              <a:t>•  Confía ciegamente y ejecuta sin revisar — Falta de HITL. Nunca ejecutes acciones de efecto real sin validar.</a:t>
+              <a:t>•  Objetivo: medir empíricamente dónde ayuda y dónde falla un LLM. Todo el ejercicio es documental; no se ataca ningún sistema.</a:t>
+            </a:r>
+          </a:p>
+          <a:p>
+            <a:pPr>
+              <a:spcAft>
+                <a:spcPts val="600"/>
+              </a:spcAft>
+            </a:pPr>
+            <a:r>
+              <a:rPr sz="1500">
+                <a:solidFill>
+                  <a:srgbClr val="22282E"/>
+                </a:solidFill>
+              </a:rPr>
+              <a:t>•  Prepara la bitácora. Crea bitacora-llm.md con columnas: Tarea | Prompt | Respuesta resumida | ¿Verificado? | Veredicto.</a:t>
+            </a:r>
+          </a:p>
+          <a:p>
+            <a:pPr>
+              <a:spcAft>
+                <a:spcPts val="600"/>
+              </a:spcAft>
+            </a:pPr>
+            <a:r>
+              <a:rPr sz="1500">
+                <a:solidFill>
+                  <a:srgbClr val="22282E"/>
+                </a:solidFill>
+              </a:rPr>
+              <a:t>•  Tarea de síntesis (valor alto). Pide al modelo: "Explica la diferencia entre un escaneo SYN y un escaneo connect de nmap". Verifica contra la documentación oficial de nmap. Registra si acierta.</a:t>
+            </a:r>
+          </a:p>
+          <a:p>
+            <a:pPr>
+              <a:spcAft>
+                <a:spcPts val="600"/>
+              </a:spcAft>
+            </a:pPr>
+            <a:r>
+              <a:rPr sz="1500">
+                <a:solidFill>
+                  <a:srgbClr val="22282E"/>
+                </a:solidFill>
+              </a:rPr>
+              <a:t>•  Tarea de generación de comando (valor medio). Pide: "Dame el comando nmap para un escaneo de los 1000 puertos más comunes con detección de versión". Antes de ejecutar nada, valida cada flag con man…</a:t>
+            </a:r>
+          </a:p>
+          <a:p>
+            <a:pPr>
+              <a:spcAft>
+                <a:spcPts val="600"/>
+              </a:spcAft>
+            </a:pPr>
+            <a:r>
+              <a:rPr sz="1500">
+                <a:solidFill>
+                  <a:srgbClr val="22282E"/>
+                </a:solidFill>
+              </a:rPr>
+              <a:t>•  Prueba de alucinación (fallo esperado). Pregunta por una CVE muy reciente o inventada: "Resume la CVE-2029-99999". Observa si el modelo confabula detalles. Registra el comportamiento.</a:t>
+            </a:r>
+          </a:p>
+          <a:p>
+            <a:pPr>
+              <a:spcAft>
+                <a:spcPts val="600"/>
+              </a:spcAft>
+            </a:pPr>
+            <a:r>
+              <a:rPr sz="1500">
+                <a:solidFill>
+                  <a:srgbClr val="22282E"/>
+                </a:solidFill>
+              </a:rPr>
+              <a:t>•  Corte de conocimiento. Pregunta "¿Cuál es la última versión de Metasploit?" y contrasta con la web oficial. Anota el desfase.</a:t>
+            </a:r>
+          </a:p>
+          <a:p>
+            <a:pPr>
+              <a:spcAft>
+                <a:spcPts val="600"/>
+              </a:spcAft>
+            </a:pPr>
+            <a:r>
+              <a:rPr sz="1500">
+                <a:solidFill>
+                  <a:srgbClr val="22282E"/>
+                </a:solidFill>
+              </a:rPr>
+              <a:t>•  Grounding. Copia un fragmento real de un aviso de seguridad y pide que lo resuma solo con esa información. Compara la calidad frente al paso 4.</a:t>
             </a:r>
           </a:p>
         </p:txBody>
@@ -3362,7 +3381,7 @@
                   <a:srgbClr val="0B3D2E"/>
                 </a:solidFill>
               </a:rPr>
-              <a:t>❓ Preguntas frecuentes</a:t>
+              <a:t>✍️ Ejercicios</a:t>
             </a:r>
           </a:p>
         </p:txBody>
@@ -3400,97 +3419,82 @@
                   <a:srgbClr val="22282E"/>
                 </a:solidFill>
               </a:rPr>
-              <a:t>•  ❓ ¿Un LLM puede "hackear solo"?</a:t>
-            </a:r>
-          </a:p>
-          <a:p>
-            <a:pPr>
-              <a:spcAft>
-                <a:spcPts val="600"/>
-              </a:spcAft>
-            </a:pPr>
-            <a:r>
-              <a:rPr sz="1500">
-                <a:solidFill>
-                  <a:srgbClr val="22282E"/>
-                </a:solidFill>
-              </a:rPr>
-              <a:t>•  No de forma fiable ni responsable. Puede sugerir pasos y comandos, pero sin verificación humana y autorización comete errores, alucina y puede causar daño. El humano dirige; el modelo asiste.</a:t>
-            </a:r>
-          </a:p>
-          <a:p>
-            <a:pPr>
-              <a:spcAft>
-                <a:spcPts val="600"/>
-              </a:spcAft>
-            </a:pPr>
-            <a:r>
-              <a:rPr sz="1500">
-                <a:solidFill>
-                  <a:srgbClr val="22282E"/>
-                </a:solidFill>
-              </a:rPr>
-              <a:t>•  ❓ ¿Por qué inventa datos si "sabe" tanto?</a:t>
-            </a:r>
-          </a:p>
-          <a:p>
-            <a:pPr>
-              <a:spcAft>
-                <a:spcPts val="600"/>
-              </a:spcAft>
-            </a:pPr>
-            <a:r>
-              <a:rPr sz="1500">
-                <a:solidFill>
-                  <a:srgbClr val="22282E"/>
-                </a:solidFill>
-              </a:rPr>
-              <a:t>•  Porque no consulta una base de hechos: predice texto plausible. Cuando no hay patrón fuerte, rellena con algo que "suena bien". Por eso el grounding y la verificación son imprescindibles.</a:t>
-            </a:r>
-          </a:p>
-          <a:p>
-            <a:pPr>
-              <a:spcAft>
-                <a:spcPts val="600"/>
-              </a:spcAft>
-            </a:pPr>
-            <a:r>
-              <a:rPr sz="1500">
-                <a:solidFill>
-                  <a:srgbClr val="22282E"/>
-                </a:solidFill>
-              </a:rPr>
-              <a:t>•  ❓ ¿Es seguro pegarle logs de un cliente?</a:t>
-            </a:r>
-          </a:p>
-          <a:p>
-            <a:pPr>
-              <a:spcAft>
-                <a:spcPts val="600"/>
-              </a:spcAft>
-            </a:pPr>
-            <a:r>
-              <a:rPr sz="1500">
-                <a:solidFill>
-                  <a:srgbClr val="22282E"/>
-                </a:solidFill>
-              </a:rPr>
-              <a:t>•  No sin autorización explícita y sin conocer la política de retención del proveedor. Trátalo como enviar datos a un tercero: aplica minimización, anonimización y consentimiento.</a:t>
-            </a:r>
-          </a:p>
-          <a:p>
-            <a:pPr>
-              <a:spcAft>
-                <a:spcPts val="600"/>
-              </a:spcAft>
-            </a:pPr>
-            <a:r>
-              <a:rPr sz="1500">
-                <a:solidFill>
-                  <a:srgbClr val="22282E"/>
-                </a:solidFill>
-              </a:rPr>
-              <a:t>•  ❓ ¿Sirve para estudiar para certificaciones?</a:t>
+              <a:t>•  Redacta una definición propia de "alucinación" con un ejemplo del dominio de redes.</a:t>
+            </a:r>
+          </a:p>
+          <a:p>
+            <a:pPr>
+              <a:spcAft>
+                <a:spcPts val="600"/>
+              </a:spcAft>
+            </a:pPr>
+            <a:r>
+              <a:rPr sz="1500">
+                <a:solidFill>
+                  <a:srgbClr val="22282E"/>
+                </a:solidFill>
+              </a:rPr>
+              <a:t>•  Clasifica 10 tareas de tu trabajo (o del curso) en valor alto/medio/nulo para un LLM y justifica.</a:t>
+            </a:r>
+          </a:p>
+          <a:p>
+            <a:pPr>
+              <a:spcAft>
+                <a:spcPts val="600"/>
+              </a:spcAft>
+            </a:pPr>
+            <a:r>
+              <a:rPr sz="1500">
+                <a:solidFill>
+                  <a:srgbClr val="22282E"/>
+                </a:solidFill>
+              </a:rPr>
+              <a:t>•  Escribe tres versiones de un mismo prompt (vago, específico, con contexto) y compara las respuestas.</a:t>
+            </a:r>
+          </a:p>
+          <a:p>
+            <a:pPr>
+              <a:spcAft>
+                <a:spcPts val="600"/>
+              </a:spcAft>
+            </a:pPr>
+            <a:r>
+              <a:rPr sz="1500">
+                <a:solidFill>
+                  <a:srgbClr val="22282E"/>
+                </a:solidFill>
+              </a:rPr>
+              <a:t>•  Diseña una checklist de verificación de 5 puntos para cualquier comando sugerido por IA.</a:t>
+            </a:r>
+          </a:p>
+          <a:p>
+            <a:pPr>
+              <a:spcAft>
+                <a:spcPts val="600"/>
+              </a:spcAft>
+            </a:pPr>
+            <a:r>
+              <a:rPr sz="1500">
+                <a:solidFill>
+                  <a:srgbClr val="22282E"/>
+                </a:solidFill>
+              </a:rPr>
+              <a:t>•  Investiga y resume la política de retención de datos de un proveedor de LLM que uses.</a:t>
+            </a:r>
+          </a:p>
+          <a:p>
+            <a:pPr>
+              <a:spcAft>
+                <a:spcPts val="600"/>
+              </a:spcAft>
+            </a:pPr>
+            <a:r>
+              <a:rPr sz="1500">
+                <a:solidFill>
+                  <a:srgbClr val="22282E"/>
+                </a:solidFill>
+              </a:rPr>
+              <a:t>•  Mapea un caso de uso propio a las cuatro funciones del NIST AI RMF (Govern, Map, Measure, Manage).</a:t>
             </a:r>
           </a:p>
         </p:txBody>
@@ -3541,7 +3545,7 @@
                   <a:srgbClr val="0B3D2E"/>
                 </a:solidFill>
               </a:rPr>
-              <a:t>🔗 Referencias</a:t>
+              <a:t>📝 Reto verificable</a:t>
             </a:r>
           </a:p>
         </p:txBody>
@@ -3579,6 +3583,453 @@
                   <a:srgbClr val="22282E"/>
                 </a:solidFill>
               </a:rPr>
+              <a:t>•  Elabora una "Política de uso responsable de LLM" de una página para un equipo de seguridad ficticio.</a:t>
+            </a:r>
+          </a:p>
+          <a:p>
+            <a:pPr>
+              <a:spcAft>
+                <a:spcPts val="600"/>
+              </a:spcAft>
+            </a:pPr>
+            <a:r>
+              <a:rPr sz="1500">
+                <a:solidFill>
+                  <a:srgbClr val="22282E"/>
+                </a:solidFill>
+              </a:rPr>
+              <a:t>•  Criterio de aceptación: el documento debe (a) listar al menos 3 usos permitidos y 3 prohibidos, (b) exigir verificación humana antes de ejecutar cualquier acción con efecto, (c) prohibir el envío de…</a:t>
+            </a:r>
+          </a:p>
+        </p:txBody>
+      </p:sp>
+    </p:spTree>
+  </p:cSld>
+  <p:clrMapOvr>
+    <a:masterClrMapping/>
+  </p:clrMapOvr>
+</p:sld>
+</file>
+
+<file path=ppt/slides/slide13.xml><?xml version="1.0" encoding="utf-8"?>
+<p:sld xmlns:a="http://schemas.openxmlformats.org/drawingml/2006/main" xmlns:p="http://schemas.openxmlformats.org/presentationml/2006/main" xmlns:r="http://schemas.openxmlformats.org/officeDocument/2006/relationships">
+  <p:cSld>
+    <p:spTree>
+      <p:nvGrpSpPr>
+        <p:cNvPr id="1" name=""/>
+        <p:cNvGrpSpPr/>
+        <p:nvPr/>
+      </p:nvGrpSpPr>
+      <p:grpSpPr/>
+      <p:sp>
+        <p:nvSpPr>
+          <p:cNvPr id="2" name="TextBox 1"/>
+          <p:cNvSpPr txBox="1"/>
+          <p:nvPr/>
+        </p:nvSpPr>
+        <p:spPr>
+          <a:xfrm>
+            <a:off x="457200" y="320040"/>
+            <a:ext cx="8229600" cy="822960"/>
+          </a:xfrm>
+          <a:prstGeom prst="rect">
+            <a:avLst/>
+          </a:prstGeom>
+          <a:noFill/>
+        </p:spPr>
+        <p:txBody>
+          <a:bodyPr wrap="square">
+            <a:spAutoFit/>
+          </a:bodyPr>
+          <a:lstStyle/>
+          <a:p>
+            <a:r>
+              <a:rPr sz="2600" b="1">
+                <a:solidFill>
+                  <a:srgbClr val="0B3D2E"/>
+                </a:solidFill>
+              </a:rPr>
+              <a:t>⚠️ Errores comunes</a:t>
+            </a:r>
+          </a:p>
+        </p:txBody>
+      </p:sp>
+      <p:sp>
+        <p:nvSpPr>
+          <p:cNvPr id="3" name="TextBox 2"/>
+          <p:cNvSpPr txBox="1"/>
+          <p:nvPr/>
+        </p:nvSpPr>
+        <p:spPr>
+          <a:xfrm>
+            <a:off x="457200" y="1280160"/>
+            <a:ext cx="8229600" cy="4937760"/>
+          </a:xfrm>
+          <a:prstGeom prst="rect">
+            <a:avLst/>
+          </a:prstGeom>
+          <a:noFill/>
+        </p:spPr>
+        <p:txBody>
+          <a:bodyPr wrap="square">
+            <a:spAutoFit/>
+          </a:bodyPr>
+          <a:lstStyle/>
+          <a:p>
+            <a:pPr>
+              <a:spcAft>
+                <a:spcPts val="600"/>
+              </a:spcAft>
+            </a:pPr>
+            <a:r>
+              <a:rPr sz="1500">
+                <a:solidFill>
+                  <a:srgbClr val="22282E"/>
+                </a:solidFill>
+              </a:rPr>
+              <a:t>•  El modelo cita una CVE que no existe — Alucinación. Verifica siempre en NVD/MITRE antes de usar el dato.</a:t>
+            </a:r>
+          </a:p>
+          <a:p>
+            <a:pPr>
+              <a:spcAft>
+                <a:spcPts val="600"/>
+              </a:spcAft>
+            </a:pPr>
+            <a:r>
+              <a:rPr sz="1500">
+                <a:solidFill>
+                  <a:srgbClr val="22282E"/>
+                </a:solidFill>
+              </a:rPr>
+              <a:t>•  Sugiere una flag de comando que da error — El modelo mezcló versiones o inventó. Contrasta con man/--help.</a:t>
+            </a:r>
+          </a:p>
+          <a:p>
+            <a:pPr>
+              <a:spcAft>
+                <a:spcPts val="600"/>
+              </a:spcAft>
+            </a:pPr>
+            <a:r>
+              <a:rPr sz="1500">
+                <a:solidFill>
+                  <a:srgbClr val="22282E"/>
+                </a:solidFill>
+              </a:rPr>
+              <a:t>•  "No conozco eventos recientes" — Corte de conocimiento. Aporta tú la información actual por contexto.</a:t>
+            </a:r>
+          </a:p>
+          <a:p>
+            <a:pPr>
+              <a:spcAft>
+                <a:spcPts val="600"/>
+              </a:spcAft>
+            </a:pPr>
+            <a:r>
+              <a:rPr sz="1500">
+                <a:solidFill>
+                  <a:srgbClr val="22282E"/>
+                </a:solidFill>
+              </a:rPr>
+              <a:t>•  Respuestas distintas a la misma pregunta — Aleatoriedad. Baja la temperatura y fija el contexto para tareas precisas.</a:t>
+            </a:r>
+          </a:p>
+          <a:p>
+            <a:pPr>
+              <a:spcAft>
+                <a:spcPts val="600"/>
+              </a:spcAft>
+            </a:pPr>
+            <a:r>
+              <a:rPr sz="1500">
+                <a:solidFill>
+                  <a:srgbClr val="22282E"/>
+                </a:solidFill>
+              </a:rPr>
+              <a:t>•  El modelo "olvida" lo dicho antes — Se salió de la ventana de contexto. Reinyecta lo esencial.</a:t>
+            </a:r>
+          </a:p>
+          <a:p>
+            <a:pPr>
+              <a:spcAft>
+                <a:spcPts val="600"/>
+              </a:spcAft>
+            </a:pPr>
+            <a:r>
+              <a:rPr sz="1500">
+                <a:solidFill>
+                  <a:srgbClr val="22282E"/>
+                </a:solidFill>
+              </a:rPr>
+              <a:t>•  Confía ciegamente y ejecuta sin revisar — Falta de HITL. Nunca ejecutes acciones de efecto real sin validar.</a:t>
+            </a:r>
+          </a:p>
+        </p:txBody>
+      </p:sp>
+    </p:spTree>
+  </p:cSld>
+  <p:clrMapOvr>
+    <a:masterClrMapping/>
+  </p:clrMapOvr>
+</p:sld>
+</file>
+
+<file path=ppt/slides/slide14.xml><?xml version="1.0" encoding="utf-8"?>
+<p:sld xmlns:a="http://schemas.openxmlformats.org/drawingml/2006/main" xmlns:p="http://schemas.openxmlformats.org/presentationml/2006/main" xmlns:r="http://schemas.openxmlformats.org/officeDocument/2006/relationships">
+  <p:cSld>
+    <p:spTree>
+      <p:nvGrpSpPr>
+        <p:cNvPr id="1" name=""/>
+        <p:cNvGrpSpPr/>
+        <p:nvPr/>
+      </p:nvGrpSpPr>
+      <p:grpSpPr/>
+      <p:sp>
+        <p:nvSpPr>
+          <p:cNvPr id="2" name="TextBox 1"/>
+          <p:cNvSpPr txBox="1"/>
+          <p:nvPr/>
+        </p:nvSpPr>
+        <p:spPr>
+          <a:xfrm>
+            <a:off x="457200" y="320040"/>
+            <a:ext cx="8229600" cy="822960"/>
+          </a:xfrm>
+          <a:prstGeom prst="rect">
+            <a:avLst/>
+          </a:prstGeom>
+          <a:noFill/>
+        </p:spPr>
+        <p:txBody>
+          <a:bodyPr wrap="square">
+            <a:spAutoFit/>
+          </a:bodyPr>
+          <a:lstStyle/>
+          <a:p>
+            <a:r>
+              <a:rPr sz="2600" b="1">
+                <a:solidFill>
+                  <a:srgbClr val="0B3D2E"/>
+                </a:solidFill>
+              </a:rPr>
+              <a:t>❓ Preguntas frecuentes</a:t>
+            </a:r>
+          </a:p>
+        </p:txBody>
+      </p:sp>
+      <p:sp>
+        <p:nvSpPr>
+          <p:cNvPr id="3" name="TextBox 2"/>
+          <p:cNvSpPr txBox="1"/>
+          <p:nvPr/>
+        </p:nvSpPr>
+        <p:spPr>
+          <a:xfrm>
+            <a:off x="457200" y="1280160"/>
+            <a:ext cx="8229600" cy="4937760"/>
+          </a:xfrm>
+          <a:prstGeom prst="rect">
+            <a:avLst/>
+          </a:prstGeom>
+          <a:noFill/>
+        </p:spPr>
+        <p:txBody>
+          <a:bodyPr wrap="square">
+            <a:spAutoFit/>
+          </a:bodyPr>
+          <a:lstStyle/>
+          <a:p>
+            <a:pPr>
+              <a:spcAft>
+                <a:spcPts val="600"/>
+              </a:spcAft>
+            </a:pPr>
+            <a:r>
+              <a:rPr sz="1500">
+                <a:solidFill>
+                  <a:srgbClr val="22282E"/>
+                </a:solidFill>
+              </a:rPr>
+              <a:t>•  ❓ ¿Un LLM puede "hackear solo"?</a:t>
+            </a:r>
+          </a:p>
+          <a:p>
+            <a:pPr>
+              <a:spcAft>
+                <a:spcPts val="600"/>
+              </a:spcAft>
+            </a:pPr>
+            <a:r>
+              <a:rPr sz="1500">
+                <a:solidFill>
+                  <a:srgbClr val="22282E"/>
+                </a:solidFill>
+              </a:rPr>
+              <a:t>•  No de forma fiable ni responsable. Puede sugerir pasos y comandos, pero sin verificación humana y autorización comete errores, alucina y puede causar daño. El humano dirige; el modelo asiste.</a:t>
+            </a:r>
+          </a:p>
+          <a:p>
+            <a:pPr>
+              <a:spcAft>
+                <a:spcPts val="600"/>
+              </a:spcAft>
+            </a:pPr>
+            <a:r>
+              <a:rPr sz="1500">
+                <a:solidFill>
+                  <a:srgbClr val="22282E"/>
+                </a:solidFill>
+              </a:rPr>
+              <a:t>•  ❓ ¿Por qué inventa datos si "sabe" tanto?</a:t>
+            </a:r>
+          </a:p>
+          <a:p>
+            <a:pPr>
+              <a:spcAft>
+                <a:spcPts val="600"/>
+              </a:spcAft>
+            </a:pPr>
+            <a:r>
+              <a:rPr sz="1500">
+                <a:solidFill>
+                  <a:srgbClr val="22282E"/>
+                </a:solidFill>
+              </a:rPr>
+              <a:t>•  Porque no consulta una base de hechos: predice texto plausible. Cuando no hay patrón fuerte, rellena con algo que "suena bien". Por eso el grounding y la verificación son imprescindibles.</a:t>
+            </a:r>
+          </a:p>
+          <a:p>
+            <a:pPr>
+              <a:spcAft>
+                <a:spcPts val="600"/>
+              </a:spcAft>
+            </a:pPr>
+            <a:r>
+              <a:rPr sz="1500">
+                <a:solidFill>
+                  <a:srgbClr val="22282E"/>
+                </a:solidFill>
+              </a:rPr>
+              <a:t>•  ❓ ¿Es seguro pegarle logs de un cliente?</a:t>
+            </a:r>
+          </a:p>
+          <a:p>
+            <a:pPr>
+              <a:spcAft>
+                <a:spcPts val="600"/>
+              </a:spcAft>
+            </a:pPr>
+            <a:r>
+              <a:rPr sz="1500">
+                <a:solidFill>
+                  <a:srgbClr val="22282E"/>
+                </a:solidFill>
+              </a:rPr>
+              <a:t>•  No sin autorización explícita y sin conocer la política de retención del proveedor. Trátalo como enviar datos a un tercero: aplica minimización, anonimización y consentimiento.</a:t>
+            </a:r>
+          </a:p>
+          <a:p>
+            <a:pPr>
+              <a:spcAft>
+                <a:spcPts val="600"/>
+              </a:spcAft>
+            </a:pPr>
+            <a:r>
+              <a:rPr sz="1500">
+                <a:solidFill>
+                  <a:srgbClr val="22282E"/>
+                </a:solidFill>
+              </a:rPr>
+              <a:t>•  ❓ ¿Sirve para estudiar para certificaciones?</a:t>
+            </a:r>
+          </a:p>
+        </p:txBody>
+      </p:sp>
+    </p:spTree>
+  </p:cSld>
+  <p:clrMapOvr>
+    <a:masterClrMapping/>
+  </p:clrMapOvr>
+</p:sld>
+</file>
+
+<file path=ppt/slides/slide15.xml><?xml version="1.0" encoding="utf-8"?>
+<p:sld xmlns:a="http://schemas.openxmlformats.org/drawingml/2006/main" xmlns:p="http://schemas.openxmlformats.org/presentationml/2006/main" xmlns:r="http://schemas.openxmlformats.org/officeDocument/2006/relationships">
+  <p:cSld>
+    <p:spTree>
+      <p:nvGrpSpPr>
+        <p:cNvPr id="1" name=""/>
+        <p:cNvGrpSpPr/>
+        <p:nvPr/>
+      </p:nvGrpSpPr>
+      <p:grpSpPr/>
+      <p:sp>
+        <p:nvSpPr>
+          <p:cNvPr id="2" name="TextBox 1"/>
+          <p:cNvSpPr txBox="1"/>
+          <p:nvPr/>
+        </p:nvSpPr>
+        <p:spPr>
+          <a:xfrm>
+            <a:off x="457200" y="320040"/>
+            <a:ext cx="8229600" cy="822960"/>
+          </a:xfrm>
+          <a:prstGeom prst="rect">
+            <a:avLst/>
+          </a:prstGeom>
+          <a:noFill/>
+        </p:spPr>
+        <p:txBody>
+          <a:bodyPr wrap="square">
+            <a:spAutoFit/>
+          </a:bodyPr>
+          <a:lstStyle/>
+          <a:p>
+            <a:r>
+              <a:rPr sz="2600" b="1">
+                <a:solidFill>
+                  <a:srgbClr val="0B3D2E"/>
+                </a:solidFill>
+              </a:rPr>
+              <a:t>🔗 Referencias</a:t>
+            </a:r>
+          </a:p>
+        </p:txBody>
+      </p:sp>
+      <p:sp>
+        <p:nvSpPr>
+          <p:cNvPr id="3" name="TextBox 2"/>
+          <p:cNvSpPr txBox="1"/>
+          <p:nvPr/>
+        </p:nvSpPr>
+        <p:spPr>
+          <a:xfrm>
+            <a:off x="457200" y="1280160"/>
+            <a:ext cx="8229600" cy="4937760"/>
+          </a:xfrm>
+          <a:prstGeom prst="rect">
+            <a:avLst/>
+          </a:prstGeom>
+          <a:noFill/>
+        </p:spPr>
+        <p:txBody>
+          <a:bodyPr wrap="square">
+            <a:spAutoFit/>
+          </a:bodyPr>
+          <a:lstStyle/>
+          <a:p>
+            <a:pPr>
+              <a:spcAft>
+                <a:spcPts val="600"/>
+              </a:spcAft>
+            </a:pPr>
+            <a:r>
+              <a:rPr sz="1500">
+                <a:solidFill>
+                  <a:srgbClr val="22282E"/>
+                </a:solidFill>
+              </a:rPr>
               <a:t>•  NIST — Artificial Intelligence Risk Management Framework (AI RMF 1.0), NIST AI 100-1 — &lt;https://www.nist.gov/itl/ai-risk-management-framework&gt;</a:t>
             </a:r>
           </a:p>
@@ -3644,6 +4095,81 @@
           </a:p>
         </p:txBody>
       </p:sp>
+    </p:spTree>
+  </p:cSld>
+  <p:clrMapOvr>
+    <a:masterClrMapping/>
+  </p:clrMapOvr>
+</p:sld>
+</file>
+
+<file path=ppt/slides/slide16.xml><?xml version="1.0" encoding="utf-8"?>
+<p:sld xmlns:a="http://schemas.openxmlformats.org/drawingml/2006/main" xmlns:p="http://schemas.openxmlformats.org/presentationml/2006/main" xmlns:r="http://schemas.openxmlformats.org/officeDocument/2006/relationships">
+  <p:cSld>
+    <p:spTree>
+      <p:nvGrpSpPr>
+        <p:cNvPr id="1" name=""/>
+        <p:cNvGrpSpPr/>
+        <p:nvPr/>
+      </p:nvGrpSpPr>
+      <p:grpSpPr/>
+      <p:sp>
+        <p:nvSpPr>
+          <p:cNvPr id="2" name="TextBox 1"/>
+          <p:cNvSpPr txBox="1"/>
+          <p:nvPr/>
+        </p:nvSpPr>
+        <p:spPr>
+          <a:xfrm>
+            <a:off x="457200" y="274320"/>
+            <a:ext cx="8229600" cy="640080"/>
+          </a:xfrm>
+          <a:prstGeom prst="rect">
+            <a:avLst/>
+          </a:prstGeom>
+          <a:noFill/>
+        </p:spPr>
+        <p:txBody>
+          <a:bodyPr wrap="square">
+            <a:spAutoFit/>
+          </a:bodyPr>
+          <a:lstStyle/>
+          <a:p>
+            <a:r>
+              <a:rPr sz="2200" b="1">
+                <a:solidFill>
+                  <a:srgbClr val="0B3D2E"/>
+                </a:solidFill>
+              </a:rPr>
+              <a:t>Diagrama de la clase</a:t>
+            </a:r>
+          </a:p>
+        </p:txBody>
+      </p:sp>
+      <p:pic>
+        <p:nvPicPr>
+          <p:cNvPr id="3" name="Picture 2" descr="8daef8a1f7ae62dc.png"/>
+          <p:cNvPicPr>
+            <a:picLocks noChangeAspect="1"/>
+          </p:cNvPicPr>
+          <p:nvPr/>
+        </p:nvPicPr>
+        <p:blipFill>
+          <a:blip r:embed="rId2"/>
+          <a:stretch>
+            <a:fillRect/>
+          </a:stretch>
+        </p:blipFill>
+        <p:spPr>
+          <a:xfrm>
+            <a:off x="457200" y="3313940"/>
+            <a:ext cx="8229600" cy="870199"/>
+          </a:xfrm>
+          <a:prstGeom prst="rect">
+            <a:avLst/>
+          </a:prstGeom>
+        </p:spPr>
+      </p:pic>
     </p:spTree>
   </p:cSld>
   <p:clrMapOvr>
@@ -3728,7 +4254,7 @@
                   <a:srgbClr val="22282E"/>
                 </a:solidFill>
               </a:rPr>
-              <a:t>•  Entender qué son los modelos generativos de lenguaje (LLM) y qué papel real juegan como herramienta de trabajo para hacer ciberseguridad: dónde aportan valor (acelerar tareas repetitivas, sintetizar información, redactar) y dónde fallan (alucinaciones, falta de contexto, datos desactualizados). Al terminar sabrás decidir cuándo apoyarte en un LLM y cuándo NO confiar en su salida sin verificación humana.</a:t>
+              <a:t>•  Entender qué son los modelos generativos de lenguaje (LLM) y qué papel real juegan como herramienta de trabajo para hacer ciberseguridad: dónde aportan valor (acelerar tareas repetitivas, sintetizar…</a:t>
             </a:r>
           </a:p>
         </p:txBody>
@@ -4122,7 +4648,7 @@
                   <a:srgbClr val="0B3D2E"/>
                 </a:solidFill>
               </a:rPr>
-              <a:t>📖 Definiciones y características</a:t>
+              <a:t>🧠 Explicación en profundidad</a:t>
             </a:r>
           </a:p>
         </p:txBody>
@@ -4160,97 +4686,37 @@
                   <a:srgbClr val="22282E"/>
                 </a:solidFill>
               </a:rPr>
-              <a:t>•  LLM (Large Language Model): modelo estadístico que predice el siguiente token (fragmento de texto) dado el contexto previo. Característica clave: no "sabe" hechos; reproduce patrones plausibles del texto con el que fue entrenado.</a:t>
-            </a:r>
-          </a:p>
-          <a:p>
-            <a:pPr>
-              <a:spcAft>
-                <a:spcPts val="600"/>
-              </a:spcAft>
-            </a:pPr>
-            <a:r>
-              <a:rPr sz="1500">
-                <a:solidFill>
-                  <a:srgbClr val="22282E"/>
-                </a:solidFill>
-              </a:rPr>
-              <a:t>•  Alucinación (o confabulación): salida gramaticalmente correcta y confiada, pero factualmente falsa o inventada (una CVE inexistente, una flag de nmap que no existe). Característica clave: es indistinguible del acierto sin verificación externa.</a:t>
-            </a:r>
-          </a:p>
-          <a:p>
-            <a:pPr>
-              <a:spcAft>
-                <a:spcPts val="600"/>
-              </a:spcAft>
-            </a:pPr>
-            <a:r>
-              <a:rPr sz="1500">
-                <a:solidFill>
-                  <a:srgbClr val="22282E"/>
-                </a:solidFill>
-              </a:rPr>
-              <a:t>•  Corte de conocimiento (knowledge cutoff): fecha hasta la que el modelo tiene datos de entrenamiento. Característica clave: todo lo posterior le es desconocido salvo que se le aporte por contexto.</a:t>
-            </a:r>
-          </a:p>
-          <a:p>
-            <a:pPr>
-              <a:spcAft>
-                <a:spcPts val="600"/>
-              </a:spcAft>
-            </a:pPr>
-            <a:r>
-              <a:rPr sz="1500">
-                <a:solidFill>
-                  <a:srgbClr val="22282E"/>
-                </a:solidFill>
-              </a:rPr>
-              <a:t>•  Ventana de contexto: cantidad de texto que el modelo puede "ver" a la vez. Característica clave: fuera de ella, el modelo no recuerda; hay que reinyectar la información relevante.</a:t>
-            </a:r>
-          </a:p>
-          <a:p>
-            <a:pPr>
-              <a:spcAft>
-                <a:spcPts val="600"/>
-              </a:spcAft>
-            </a:pPr>
-            <a:r>
-              <a:rPr sz="1500">
-                <a:solidFill>
-                  <a:srgbClr val="22282E"/>
-                </a:solidFill>
-              </a:rPr>
-              <a:t>•  Human-in-the-loop (HITL): patrón donde una persona revisa y autoriza antes de que la salida del modelo tenga efecto real. Característica clave: convierte una sugerencia en una acción responsable y trazable.</a:t>
-            </a:r>
-          </a:p>
-          <a:p>
-            <a:pPr>
-              <a:spcAft>
-                <a:spcPts val="600"/>
-              </a:spcAft>
-            </a:pPr>
-            <a:r>
-              <a:rPr sz="1500">
-                <a:solidFill>
-                  <a:srgbClr val="22282E"/>
-                </a:solidFill>
-              </a:rPr>
-              <a:t>•  Grounding / RAG: técnica de anclar la respuesta a documentos verificados aportados al modelo. Característica clave: reduce alucinaciones al forzar que responda desde fuentes concretas.</a:t>
-            </a:r>
-          </a:p>
-          <a:p>
-            <a:pPr>
-              <a:spcAft>
-                <a:spcPts val="600"/>
-              </a:spcAft>
-            </a:pPr>
-            <a:r>
-              <a:rPr sz="1500">
-                <a:solidFill>
-                  <a:srgbClr val="22282E"/>
-                </a:solidFill>
-              </a:rPr>
-              <a:t>•  Temperatura: parámetro que controla la aleatoriedad de la salida. Característica clave: temperatura baja da respuestas más deterministas, útil para tareas técnicas precisas.</a:t>
+              <a:t>•  Un LLM predice salidas condicionadas por contexto; no consulta verdad ni mantiene conocimiento operativo garantizado. En seguridad puede resumir, transformar y proponer hipótesis, pero cada…</a:t>
+            </a:r>
+          </a:p>
+          <a:p>
+            <a:pPr>
+              <a:spcAft>
+                <a:spcPts val="600"/>
+              </a:spcAft>
+            </a:pPr>
+            <a:r>
+              <a:rPr sz="1500">
+                <a:solidFill>
+                  <a:srgbClr val="22282E"/>
+                </a:solidFill>
+              </a:rPr>
+              <a:t>•  El diagrama separa lenguaje de autoridad. El modelo puede proponer; la política determina si la operación pertenece al alcance; la herramienta produce evidencia; y una persona o control determinista…</a:t>
+            </a:r>
+          </a:p>
+          <a:p>
+            <a:pPr>
+              <a:spcAft>
+                <a:spcPts val="600"/>
+              </a:spcAft>
+            </a:pPr>
+            <a:r>
+              <a:rPr sz="1500">
+                <a:solidFill>
+                  <a:srgbClr val="22282E"/>
+                </a:solidFill>
+              </a:rPr>
+              <a:t>•  El modelo atribuye un CVE correcto al producto equivocado. El analista conserva la hipótesis y la descarta al verificar versión y aviso oficial.</a:t>
             </a:r>
           </a:p>
         </p:txBody>
@@ -4301,7 +4767,7 @@
                   <a:srgbClr val="0B3D2E"/>
                 </a:solidFill>
               </a:rPr>
-              <a:t>🧰 Herramientas y preparación</a:t>
+              <a:t>📔 Glosario operativo</a:t>
             </a:r>
           </a:p>
         </p:txBody>
@@ -4339,52 +4805,52 @@
                   <a:srgbClr val="22282E"/>
                 </a:solidFill>
               </a:rPr>
-              <a:t>•  Un cliente de LLM: interfaz web (Claude, ChatGPT, Gemini) o CLI (Claude Code, Gemini CLI) — estos últimos son la base de las clases siguientes.</a:t>
-            </a:r>
-          </a:p>
-          <a:p>
-            <a:pPr>
-              <a:spcAft>
-                <a:spcPts val="600"/>
-              </a:spcAft>
-            </a:pPr>
-            <a:r>
-              <a:rPr sz="1500">
-                <a:solidFill>
-                  <a:srgbClr val="22282E"/>
-                </a:solidFill>
-              </a:rPr>
-              <a:t>•  Cuaderno de laboratorio (Markdown) para registrar prompts, respuestas y verificaciones.</a:t>
-            </a:r>
-          </a:p>
-          <a:p>
-            <a:pPr>
-              <a:spcAft>
-                <a:spcPts val="600"/>
-              </a:spcAft>
-            </a:pPr>
-            <a:r>
-              <a:rPr sz="1500">
-                <a:solidFill>
-                  <a:srgbClr val="22282E"/>
-                </a:solidFill>
-              </a:rPr>
-              <a:t>•  Acceso a fuentes autoritativas para contrastar: MITRE ATT&amp;CK, NVD, OWASP, páginas man de las herramientas.</a:t>
-            </a:r>
-          </a:p>
-          <a:p>
-            <a:pPr>
-              <a:spcAft>
-                <a:spcPts val="600"/>
-              </a:spcAft>
-            </a:pPr>
-            <a:r>
-              <a:rPr sz="1500">
-                <a:solidFill>
-                  <a:srgbClr val="22282E"/>
-                </a:solidFill>
-              </a:rPr>
-              <a:t>•  Recordatorio: nunca pegues datos sensibles (credenciales, PII, código propietario, hallazgos de un cliente) en un LLM de terceros sin autorización y sin conocer su política de retención de datos.</a:t>
+              <a:t>•  Término — Definición</a:t>
+            </a:r>
+          </a:p>
+          <a:p>
+            <a:pPr>
+              <a:spcAft>
+                <a:spcPts val="600"/>
+              </a:spcAft>
+            </a:pPr>
+            <a:r>
+              <a:rPr sz="1500">
+                <a:solidFill>
+                  <a:srgbClr val="22282E"/>
+                </a:solidFill>
+              </a:rPr>
+              <a:t>•  Grounding — Vinculación de una salida con evidencia accesible.</a:t>
+            </a:r>
+          </a:p>
+          <a:p>
+            <a:pPr>
+              <a:spcAft>
+                <a:spcPts val="600"/>
+              </a:spcAft>
+            </a:pPr>
+            <a:r>
+              <a:rPr sz="1500">
+                <a:solidFill>
+                  <a:srgbClr val="22282E"/>
+                </a:solidFill>
+              </a:rPr>
+              <a:t>•  Guardrail — Capa que reduce una capacidad o detecta su uso; no garantía absoluta.</a:t>
+            </a:r>
+          </a:p>
+          <a:p>
+            <a:pPr>
+              <a:spcAft>
+                <a:spcPts val="600"/>
+              </a:spcAft>
+            </a:pPr>
+            <a:r>
+              <a:rPr sz="1500">
+                <a:solidFill>
+                  <a:srgbClr val="22282E"/>
+                </a:solidFill>
+              </a:rPr>
+              <a:t>•  Audit trail — Registro ordenado de solicitudes, decisiones, ejecuciones y resultados.</a:t>
             </a:r>
           </a:p>
         </p:txBody>
@@ -4435,7 +4901,7 @@
                   <a:srgbClr val="0B3D2E"/>
                 </a:solidFill>
               </a:rPr>
-              <a:t>🧪 Laboratorio guiado</a:t>
+              <a:t>✅ Criterio de dominio</a:t>
             </a:r>
           </a:p>
         </p:txBody>
@@ -4473,97 +4939,7 @@
                   <a:srgbClr val="22282E"/>
                 </a:solidFill>
               </a:rPr>
-              <a:t>•  Objetivo: medir empíricamente dónde ayuda y dónde falla un LLM. Todo el ejercicio es documental; no se ataca ningún sistema.</a:t>
-            </a:r>
-          </a:p>
-          <a:p>
-            <a:pPr>
-              <a:spcAft>
-                <a:spcPts val="600"/>
-              </a:spcAft>
-            </a:pPr>
-            <a:r>
-              <a:rPr sz="1500">
-                <a:solidFill>
-                  <a:srgbClr val="22282E"/>
-                </a:solidFill>
-              </a:rPr>
-              <a:t>•  Prepara la bitácora. Crea bitacora-llm.md con columnas: Tarea | Prompt | Respuesta resumida | ¿Verificado? | Veredicto.</a:t>
-            </a:r>
-          </a:p>
-          <a:p>
-            <a:pPr>
-              <a:spcAft>
-                <a:spcPts val="600"/>
-              </a:spcAft>
-            </a:pPr>
-            <a:r>
-              <a:rPr sz="1500">
-                <a:solidFill>
-                  <a:srgbClr val="22282E"/>
-                </a:solidFill>
-              </a:rPr>
-              <a:t>•  Tarea de síntesis (valor alto). Pide al modelo: "Explica la diferencia entre un escaneo SYN y un escaneo connect de nmap". Verifica contra la documentación oficial de nmap. Registra si acierta.</a:t>
-            </a:r>
-          </a:p>
-          <a:p>
-            <a:pPr>
-              <a:spcAft>
-                <a:spcPts val="600"/>
-              </a:spcAft>
-            </a:pPr>
-            <a:r>
-              <a:rPr sz="1500">
-                <a:solidFill>
-                  <a:srgbClr val="22282E"/>
-                </a:solidFill>
-              </a:rPr>
-              <a:t>•  Tarea de generación de comando (valor medio). Pide: "Dame el comando nmap para un escaneo de los 1000 puertos más comunes con detección de versión". Antes de ejecutar nada, valida cada flag con man nmap. Anota flags inexistentes o mal usadas.</a:t>
-            </a:r>
-          </a:p>
-          <a:p>
-            <a:pPr>
-              <a:spcAft>
-                <a:spcPts val="600"/>
-              </a:spcAft>
-            </a:pPr>
-            <a:r>
-              <a:rPr sz="1500">
-                <a:solidFill>
-                  <a:srgbClr val="22282E"/>
-                </a:solidFill>
-              </a:rPr>
-              <a:t>•  Prueba de alucinación (fallo esperado). Pregunta por una CVE muy reciente o inventada: "Resume la CVE-2029-99999". Observa si el modelo confabula detalles. Registra el comportamiento.</a:t>
-            </a:r>
-          </a:p>
-          <a:p>
-            <a:pPr>
-              <a:spcAft>
-                <a:spcPts val="600"/>
-              </a:spcAft>
-            </a:pPr>
-            <a:r>
-              <a:rPr sz="1500">
-                <a:solidFill>
-                  <a:srgbClr val="22282E"/>
-                </a:solidFill>
-              </a:rPr>
-              <a:t>•  Corte de conocimiento. Pregunta "¿Cuál es la última versión de Metasploit?" y contrasta con la web oficial. Anota el desfase.</a:t>
-            </a:r>
-          </a:p>
-          <a:p>
-            <a:pPr>
-              <a:spcAft>
-                <a:spcPts val="600"/>
-              </a:spcAft>
-            </a:pPr>
-            <a:r>
-              <a:rPr sz="1500">
-                <a:solidFill>
-                  <a:srgbClr val="22282E"/>
-                </a:solidFill>
-              </a:rPr>
-              <a:t>•  Grounding. Copia un fragmento real de un aviso de seguridad y pide que lo resuma solo con esa información. Compara la calidad frente al paso 4.</a:t>
+              <a:t>•  El alumno demuestra dominio cuando reproduce el flujo completo, puede atribuir cada acción, evita que texto no confiable otorgue autoridad y explica qué control contiene un fallo del modelo.</a:t>
             </a:r>
           </a:p>
         </p:txBody>
@@ -4614,7 +4990,7 @@
                   <a:srgbClr val="0B3D2E"/>
                 </a:solidFill>
               </a:rPr>
-              <a:t>✍️ Ejercicios</a:t>
+              <a:t>📖 Definiciones y características</a:t>
             </a:r>
           </a:p>
         </p:txBody>
@@ -4652,82 +5028,97 @@
                   <a:srgbClr val="22282E"/>
                 </a:solidFill>
               </a:rPr>
-              <a:t>•  Redacta una definición propia de "alucinación" con un ejemplo del dominio de redes.</a:t>
-            </a:r>
-          </a:p>
-          <a:p>
-            <a:pPr>
-              <a:spcAft>
-                <a:spcPts val="600"/>
-              </a:spcAft>
-            </a:pPr>
-            <a:r>
-              <a:rPr sz="1500">
-                <a:solidFill>
-                  <a:srgbClr val="22282E"/>
-                </a:solidFill>
-              </a:rPr>
-              <a:t>•  Clasifica 10 tareas de tu trabajo (o del curso) en valor alto/medio/nulo para un LLM y justifica.</a:t>
-            </a:r>
-          </a:p>
-          <a:p>
-            <a:pPr>
-              <a:spcAft>
-                <a:spcPts val="600"/>
-              </a:spcAft>
-            </a:pPr>
-            <a:r>
-              <a:rPr sz="1500">
-                <a:solidFill>
-                  <a:srgbClr val="22282E"/>
-                </a:solidFill>
-              </a:rPr>
-              <a:t>•  Escribe tres versiones de un mismo prompt (vago, específico, con contexto) y compara las respuestas.</a:t>
-            </a:r>
-          </a:p>
-          <a:p>
-            <a:pPr>
-              <a:spcAft>
-                <a:spcPts val="600"/>
-              </a:spcAft>
-            </a:pPr>
-            <a:r>
-              <a:rPr sz="1500">
-                <a:solidFill>
-                  <a:srgbClr val="22282E"/>
-                </a:solidFill>
-              </a:rPr>
-              <a:t>•  Diseña una checklist de verificación de 5 puntos para cualquier comando sugerido por IA.</a:t>
-            </a:r>
-          </a:p>
-          <a:p>
-            <a:pPr>
-              <a:spcAft>
-                <a:spcPts val="600"/>
-              </a:spcAft>
-            </a:pPr>
-            <a:r>
-              <a:rPr sz="1500">
-                <a:solidFill>
-                  <a:srgbClr val="22282E"/>
-                </a:solidFill>
-              </a:rPr>
-              <a:t>•  Investiga y resume la política de retención de datos de un proveedor de LLM que uses.</a:t>
-            </a:r>
-          </a:p>
-          <a:p>
-            <a:pPr>
-              <a:spcAft>
-                <a:spcPts val="600"/>
-              </a:spcAft>
-            </a:pPr>
-            <a:r>
-              <a:rPr sz="1500">
-                <a:solidFill>
-                  <a:srgbClr val="22282E"/>
-                </a:solidFill>
-              </a:rPr>
-              <a:t>•  Mapea un caso de uso propio a las cuatro funciones del NIST AI RMF (Govern, Map, Measure, Manage).</a:t>
+              <a:t>•  LLM (Large Language Model): modelo estadístico que predice el siguiente token (fragmento de texto) dado el contexto previo. Característica clave: no "sabe" hechos; reproduce patrones plausibles del…</a:t>
+            </a:r>
+          </a:p>
+          <a:p>
+            <a:pPr>
+              <a:spcAft>
+                <a:spcPts val="600"/>
+              </a:spcAft>
+            </a:pPr>
+            <a:r>
+              <a:rPr sz="1500">
+                <a:solidFill>
+                  <a:srgbClr val="22282E"/>
+                </a:solidFill>
+              </a:rPr>
+              <a:t>•  Alucinación (o confabulación): salida gramaticalmente correcta y confiada, pero factualmente falsa o inventada (una CVE inexistente, una flag de nmap que no existe). Característica clave: es…</a:t>
+            </a:r>
+          </a:p>
+          <a:p>
+            <a:pPr>
+              <a:spcAft>
+                <a:spcPts val="600"/>
+              </a:spcAft>
+            </a:pPr>
+            <a:r>
+              <a:rPr sz="1500">
+                <a:solidFill>
+                  <a:srgbClr val="22282E"/>
+                </a:solidFill>
+              </a:rPr>
+              <a:t>•  Corte de conocimiento (knowledge cutoff): fecha hasta la que el modelo tiene datos de entrenamiento. Característica clave: todo lo posterior le es desconocido salvo que se le aporte por contexto.</a:t>
+            </a:r>
+          </a:p>
+          <a:p>
+            <a:pPr>
+              <a:spcAft>
+                <a:spcPts val="600"/>
+              </a:spcAft>
+            </a:pPr>
+            <a:r>
+              <a:rPr sz="1500">
+                <a:solidFill>
+                  <a:srgbClr val="22282E"/>
+                </a:solidFill>
+              </a:rPr>
+              <a:t>•  Ventana de contexto: cantidad de texto que el modelo puede "ver" a la vez. Característica clave: fuera de ella, el modelo no recuerda; hay que reinyectar la información relevante.</a:t>
+            </a:r>
+          </a:p>
+          <a:p>
+            <a:pPr>
+              <a:spcAft>
+                <a:spcPts val="600"/>
+              </a:spcAft>
+            </a:pPr>
+            <a:r>
+              <a:rPr sz="1500">
+                <a:solidFill>
+                  <a:srgbClr val="22282E"/>
+                </a:solidFill>
+              </a:rPr>
+              <a:t>•  Human-in-the-loop (HITL): patrón donde una persona revisa y autoriza antes de que la salida del modelo tenga efecto real. Característica clave: convierte una sugerencia en una acción responsable y…</a:t>
+            </a:r>
+          </a:p>
+          <a:p>
+            <a:pPr>
+              <a:spcAft>
+                <a:spcPts val="600"/>
+              </a:spcAft>
+            </a:pPr>
+            <a:r>
+              <a:rPr sz="1500">
+                <a:solidFill>
+                  <a:srgbClr val="22282E"/>
+                </a:solidFill>
+              </a:rPr>
+              <a:t>•  Grounding / RAG: técnica de anclar la respuesta a documentos verificados aportados al modelo. Característica clave: reduce alucinaciones al forzar que responda desde fuentes concretas.</a:t>
+            </a:r>
+          </a:p>
+          <a:p>
+            <a:pPr>
+              <a:spcAft>
+                <a:spcPts val="600"/>
+              </a:spcAft>
+            </a:pPr>
+            <a:r>
+              <a:rPr sz="1500">
+                <a:solidFill>
+                  <a:srgbClr val="22282E"/>
+                </a:solidFill>
+              </a:rPr>
+              <a:t>•  Temperatura: parámetro que controla la aleatoriedad de la salida. Característica clave: temperatura baja da respuestas más deterministas, útil para tareas técnicas precisas.</a:t>
             </a:r>
           </a:p>
         </p:txBody>
@@ -4778,7 +5169,7 @@
                   <a:srgbClr val="0B3D2E"/>
                 </a:solidFill>
               </a:rPr>
-              <a:t>📝 Reto verificable</a:t>
+              <a:t>🧰 Herramientas y preparación</a:t>
             </a:r>
           </a:p>
         </p:txBody>
@@ -4816,22 +5207,52 @@
                   <a:srgbClr val="22282E"/>
                 </a:solidFill>
               </a:rPr>
-              <a:t>•  Elabora una "Política de uso responsable de LLM" de una página para un equipo de seguridad ficticio.</a:t>
-            </a:r>
-          </a:p>
-          <a:p>
-            <a:pPr>
-              <a:spcAft>
-                <a:spcPts val="600"/>
-              </a:spcAft>
-            </a:pPr>
-            <a:r>
-              <a:rPr sz="1500">
-                <a:solidFill>
-                  <a:srgbClr val="22282E"/>
-                </a:solidFill>
-              </a:rPr>
-              <a:t>•  Criterio de aceptación: el documento debe (a) listar al menos 3 usos permitidos y 3 prohibidos, (b) exigir verificación humana antes de ejecutar cualquier acción con efecto, (c) prohibir el envío de datos sensibles a modelos externos sin autorización, y (d) referenciar explícitamente el NIST AI RMF. Un compañero debe poder leerlo y saber qué puede y qué no puede hacer con IA.</a:t>
+              <a:t>•  Un cliente de LLM: interfaz web (Claude, ChatGPT, Gemini) o CLI (Claude Code, Gemini CLI) — estos últimos son la base de las clases siguientes.</a:t>
+            </a:r>
+          </a:p>
+          <a:p>
+            <a:pPr>
+              <a:spcAft>
+                <a:spcPts val="600"/>
+              </a:spcAft>
+            </a:pPr>
+            <a:r>
+              <a:rPr sz="1500">
+                <a:solidFill>
+                  <a:srgbClr val="22282E"/>
+                </a:solidFill>
+              </a:rPr>
+              <a:t>•  Cuaderno de laboratorio (Markdown) para registrar prompts, respuestas y verificaciones.</a:t>
+            </a:r>
+          </a:p>
+          <a:p>
+            <a:pPr>
+              <a:spcAft>
+                <a:spcPts val="600"/>
+              </a:spcAft>
+            </a:pPr>
+            <a:r>
+              <a:rPr sz="1500">
+                <a:solidFill>
+                  <a:srgbClr val="22282E"/>
+                </a:solidFill>
+              </a:rPr>
+              <a:t>•  Acceso a fuentes autoritativas para contrastar: MITRE ATT&amp;CK, NVD, OWASP, páginas man de las herramientas.</a:t>
+            </a:r>
+          </a:p>
+          <a:p>
+            <a:pPr>
+              <a:spcAft>
+                <a:spcPts val="600"/>
+              </a:spcAft>
+            </a:pPr>
+            <a:r>
+              <a:rPr sz="1500">
+                <a:solidFill>
+                  <a:srgbClr val="22282E"/>
+                </a:solidFill>
+              </a:rPr>
+              <a:t>•  Recordatorio: nunca pegues datos sensibles (credenciales, PII, código propietario, hallazgos de un cliente) en un LLM de terceros sin autorización y sin conocer su política de retención de datos.</a:t>
             </a:r>
           </a:p>
         </p:txBody>
